--- a/poc/fixtures/feature-rich.pptx
+++ b/poc/fixtures/feature-rich.pptx
@@ -2,14 +2,14 @@
 <file path=ppt/presentation.xml><?xml version="1.0" encoding="utf-8"?>
 <p:presentation xmlns:p="http://schemas.openxmlformats.org/presentationml/2006/main">
   <p:sldMasterIdLst>
-    <p:sldMasterId xmlns:r="http://schemas.openxmlformats.org/officeDocument/2006/relationships" id="2147483648" r:id="Rb71bf82a03da44c9"/>
+    <p:sldMasterId xmlns:r="http://schemas.openxmlformats.org/officeDocument/2006/relationships" id="2147483648" r:id="R96e7e610698f43fb"/>
   </p:sldMasterIdLst>
   <p:notesMasterIdLst>
-    <p:notesMasterId xmlns:r="http://schemas.openxmlformats.org/officeDocument/2006/relationships" r:id="R5380357df4014dd1"/>
+    <p:notesMasterId xmlns:r="http://schemas.openxmlformats.org/officeDocument/2006/relationships" r:id="R643f0ab4f52548d0"/>
   </p:notesMasterIdLst>
   <p:sldIdLst>
-    <p:sldId xmlns:r="http://schemas.openxmlformats.org/officeDocument/2006/relationships" id="256" r:id="R34537afc78364a5c"/>
-    <p:sldId xmlns:r="http://schemas.openxmlformats.org/officeDocument/2006/relationships" id="257" r:id="R7f900931350a4758"/>
+    <p:sldId xmlns:r="http://schemas.openxmlformats.org/officeDocument/2006/relationships" id="256" r:id="Rea625157f3cd4a29"/>
+    <p:sldId xmlns:r="http://schemas.openxmlformats.org/officeDocument/2006/relationships" id="257" r:id="Rdaf28cd7b6694d41"/>
   </p:sldIdLst>
   <p:sldSz cx="12192000" cy="6858000"/>
   <p:notesSz cx="6858000" cy="9144000"/>
@@ -573,7 +573,7 @@
   </p:cSld>
   <p:clrMap bg1="lt1" tx1="dk1" bg2="lt2" tx2="dk2" accent1="accent1" accent2="accent2" accent3="accent3" accent4="accent4" accent5="accent5" accent6="accent6" hlink="hlink" folHlink="folHlink"/>
   <p:sldLayoutIdLst>
-    <p:sldLayoutId xmlns:r="http://schemas.openxmlformats.org/officeDocument/2006/relationships" id="2147483649" r:id="R3f2ddf0812704cc2"/>
+    <p:sldLayoutId xmlns:r="http://schemas.openxmlformats.org/officeDocument/2006/relationships" id="2147483649" r:id="R509bf42be38b4dfa"/>
   </p:sldLayoutIdLst>
   <p:txStyles>
     <p:titleStyle>
@@ -1328,7 +1328,7 @@
           <p:cNvPr id="16" name="">
             <a:extLst xmlns:a="http://schemas.openxmlformats.org/drawingml/2006/main">
               <a:ext uri="{FF2B5EF4-FFF2-40B4-BE49-F238E27FC236}">
-                <a16:creationId xmlns:a16="http://schemas.microsoft.com/office/drawing/2014/main" id="{A27B9E52-CA4D-42DA-A02A-B70668C5D947}"/>
+                <a16:creationId xmlns:a16="http://schemas.microsoft.com/office/drawing/2014/main" id="{0C648AA5-F696-4052-9D52-93499E33545E}"/>
               </a:ext>
             </a:extLst>
           </p:cNvPr>
@@ -1378,7 +1378,7 @@
           <p:cNvPr id="2" name="">
             <a:extLst xmlns:a="http://schemas.openxmlformats.org/drawingml/2006/main">
               <a:ext uri="{FF2B5EF4-FFF2-40B4-BE49-F238E27FC236}">
-                <a16:creationId xmlns:a16="http://schemas.microsoft.com/office/drawing/2014/main" id="{1E3B0DCA-8BDE-42B8-A6BB-785183DEE980}"/>
+                <a16:creationId xmlns:a16="http://schemas.microsoft.com/office/drawing/2014/main" id="{944B4A95-681D-46E1-AE18-0A04AC1671F0}"/>
               </a:ext>
             </a:extLst>
           </p:cNvPr>
@@ -1445,7 +1445,7 @@
           <p:cNvPr id="3" name="">
             <a:extLst xmlns:a="http://schemas.openxmlformats.org/drawingml/2006/main">
               <a:ext uri="{FF2B5EF4-FFF2-40B4-BE49-F238E27FC236}">
-                <a16:creationId xmlns:a16="http://schemas.microsoft.com/office/drawing/2014/main" id="{C40170DA-EACE-4C1D-A9A0-C42A62D18158}"/>
+                <a16:creationId xmlns:a16="http://schemas.microsoft.com/office/drawing/2014/main" id="{5E81FA42-433F-4308-A3B7-C1B272E1921D}"/>
               </a:ext>
             </a:extLst>
           </p:cNvPr>
@@ -1485,7 +1485,7 @@
                   <a:srgbClr val="1447E6"/>
                 </a:solidFill>
               </a:rPr>
-              <a:t>EVO_EDIT_MARKER_PPTX</a:t>
+              <a:t>CAPY_EDIT_MARKER_PPTX</a:t>
             </a:r>
           </a:p>
         </p:txBody>
@@ -1495,7 +1495,7 @@
           <p:cNvPr id="4" name="">
             <a:extLst xmlns:a="http://schemas.openxmlformats.org/drawingml/2006/main">
               <a:ext uri="{FF2B5EF4-FFF2-40B4-BE49-F238E27FC236}">
-                <a16:creationId xmlns:a16="http://schemas.microsoft.com/office/drawing/2014/main" id="{13EACE9C-1D0B-4881-8074-DD48444AA59A}"/>
+                <a16:creationId xmlns:a16="http://schemas.microsoft.com/office/drawing/2014/main" id="{D307AB2F-FEF6-4DDA-8D81-03A2894BFC54}"/>
               </a:ext>
             </a:extLst>
           </p:cNvPr>
@@ -1536,7 +1536,7 @@
           <p:cNvPr id="5" name="">
             <a:extLst xmlns:a="http://schemas.openxmlformats.org/drawingml/2006/main">
               <a:ext uri="{FF2B5EF4-FFF2-40B4-BE49-F238E27FC236}">
-                <a16:creationId xmlns:a16="http://schemas.microsoft.com/office/drawing/2014/main" id="{C85C025E-2444-4354-886E-1D9170F3BFFA}"/>
+                <a16:creationId xmlns:a16="http://schemas.microsoft.com/office/drawing/2014/main" id="{31F26B1D-DB08-4422-BC1D-00C063BC047E}"/>
               </a:ext>
             </a:extLst>
           </p:cNvPr>
@@ -1586,7 +1586,7 @@
           <p:cNvPr id="6" name="">
             <a:extLst xmlns:a="http://schemas.openxmlformats.org/drawingml/2006/main">
               <a:ext uri="{FF2B5EF4-FFF2-40B4-BE49-F238E27FC236}">
-                <a16:creationId xmlns:a16="http://schemas.microsoft.com/office/drawing/2014/main" id="{FC046904-1D04-470F-B20F-80E24B2AEFE5}"/>
+                <a16:creationId xmlns:a16="http://schemas.microsoft.com/office/drawing/2014/main" id="{8F80F85D-430E-45C9-94EA-1089754896D4}"/>
               </a:ext>
             </a:extLst>
           </p:cNvPr>
@@ -1636,7 +1636,7 @@
           <p:cNvPr id="7" name="">
             <a:extLst xmlns:a="http://schemas.openxmlformats.org/drawingml/2006/main">
               <a:ext uri="{FF2B5EF4-FFF2-40B4-BE49-F238E27FC236}">
-                <a16:creationId xmlns:a16="http://schemas.microsoft.com/office/drawing/2014/main" id="{DB71916A-53CD-4AD9-8DCC-24D6EF44FCF9}"/>
+                <a16:creationId xmlns:a16="http://schemas.microsoft.com/office/drawing/2014/main" id="{A1695EAE-4E72-48A4-A214-335493BF38C5}"/>
               </a:ext>
             </a:extLst>
           </p:cNvPr>
@@ -1686,7 +1686,7 @@
           <p:cNvPr id="8" name="">
             <a:extLst xmlns:a="http://schemas.openxmlformats.org/drawingml/2006/main">
               <a:ext uri="{FF2B5EF4-FFF2-40B4-BE49-F238E27FC236}">
-                <a16:creationId xmlns:a16="http://schemas.microsoft.com/office/drawing/2014/main" id="{C71BD16F-B0EC-4888-8137-312F004388F7}"/>
+                <a16:creationId xmlns:a16="http://schemas.microsoft.com/office/drawing/2014/main" id="{E6C5CD90-9F28-4A0C-920B-8B08B32ACC8C}"/>
               </a:ext>
             </a:extLst>
           </p:cNvPr>
@@ -1727,7 +1727,7 @@
           <p:cNvPr id="9" name="">
             <a:extLst xmlns:a="http://schemas.openxmlformats.org/drawingml/2006/main">
               <a:ext uri="{FF2B5EF4-FFF2-40B4-BE49-F238E27FC236}">
-                <a16:creationId xmlns:a16="http://schemas.microsoft.com/office/drawing/2014/main" id="{7B3641FE-7827-404D-AE19-A4D319DC4498}"/>
+                <a16:creationId xmlns:a16="http://schemas.microsoft.com/office/drawing/2014/main" id="{A36608B4-10C7-45AD-88FA-5B71CF69B42C}"/>
               </a:ext>
             </a:extLst>
           </p:cNvPr>
@@ -1777,7 +1777,7 @@
           <p:cNvPr id="10" name="">
             <a:extLst xmlns:a="http://schemas.openxmlformats.org/drawingml/2006/main">
               <a:ext uri="{FF2B5EF4-FFF2-40B4-BE49-F238E27FC236}">
-                <a16:creationId xmlns:a16="http://schemas.microsoft.com/office/drawing/2014/main" id="{D3617C3C-8E9F-4A52-8543-6499B2B6ED1E}"/>
+                <a16:creationId xmlns:a16="http://schemas.microsoft.com/office/drawing/2014/main" id="{B1E3A602-DDFF-4A06-A1EF-F36BACD94EA1}"/>
               </a:ext>
             </a:extLst>
           </p:cNvPr>
@@ -1827,7 +1827,7 @@
           <p:cNvPr id="11" name="">
             <a:extLst xmlns:a="http://schemas.openxmlformats.org/drawingml/2006/main">
               <a:ext uri="{FF2B5EF4-FFF2-40B4-BE49-F238E27FC236}">
-                <a16:creationId xmlns:a16="http://schemas.microsoft.com/office/drawing/2014/main" id="{F349E328-4818-49F5-B06F-135EDD2D5294}"/>
+                <a16:creationId xmlns:a16="http://schemas.microsoft.com/office/drawing/2014/main" id="{5AC43137-2C81-4D76-90C2-CF9E71302C38}"/>
               </a:ext>
             </a:extLst>
           </p:cNvPr>
@@ -1877,7 +1877,7 @@
           <p:cNvPr id="12" name="">
             <a:extLst xmlns:a="http://schemas.openxmlformats.org/drawingml/2006/main">
               <a:ext uri="{FF2B5EF4-FFF2-40B4-BE49-F238E27FC236}">
-                <a16:creationId xmlns:a16="http://schemas.microsoft.com/office/drawing/2014/main" id="{97F86057-9BBD-4D78-B82F-BCEA4E55616D}"/>
+                <a16:creationId xmlns:a16="http://schemas.microsoft.com/office/drawing/2014/main" id="{3D594416-31B4-43F3-860C-611E1FC7186D}"/>
               </a:ext>
             </a:extLst>
           </p:cNvPr>
@@ -1918,7 +1918,7 @@
           <p:cNvPr id="13" name="">
             <a:extLst xmlns:a="http://schemas.openxmlformats.org/drawingml/2006/main">
               <a:ext uri="{FF2B5EF4-FFF2-40B4-BE49-F238E27FC236}">
-                <a16:creationId xmlns:a16="http://schemas.microsoft.com/office/drawing/2014/main" id="{42A93AEC-4A47-4F3E-9FDD-48321419765F}"/>
+                <a16:creationId xmlns:a16="http://schemas.microsoft.com/office/drawing/2014/main" id="{F975B5C9-FEC4-4566-8B03-C1ADD8C605F1}"/>
               </a:ext>
             </a:extLst>
           </p:cNvPr>
@@ -1968,7 +1968,7 @@
           <p:cNvPr id="14" name="">
             <a:extLst xmlns:a="http://schemas.openxmlformats.org/drawingml/2006/main">
               <a:ext uri="{FF2B5EF4-FFF2-40B4-BE49-F238E27FC236}">
-                <a16:creationId xmlns:a16="http://schemas.microsoft.com/office/drawing/2014/main" id="{16E4236D-C37C-415C-A2E2-CA4198A9DD04}"/>
+                <a16:creationId xmlns:a16="http://schemas.microsoft.com/office/drawing/2014/main" id="{2851EB1A-84D8-4132-BFC6-814A4F133077}"/>
               </a:ext>
             </a:extLst>
           </p:cNvPr>
@@ -2018,7 +2018,7 @@
           <p:cNvPr id="15" name="">
             <a:extLst xmlns:a="http://schemas.openxmlformats.org/drawingml/2006/main">
               <a:ext uri="{FF2B5EF4-FFF2-40B4-BE49-F238E27FC236}">
-                <a16:creationId xmlns:a16="http://schemas.microsoft.com/office/drawing/2014/main" id="{99E05495-8EC3-4832-AECF-591B154FB09B}"/>
+                <a16:creationId xmlns:a16="http://schemas.microsoft.com/office/drawing/2014/main" id="{352D4D30-3D24-430C-901E-D74380398F0A}"/>
               </a:ext>
             </a:extLst>
           </p:cNvPr>
@@ -2066,7 +2066,7 @@
     </p:spTree>
     <p:extLst>
       <p:ext uri="{BB962C8B-B14F-4D97-AF65-F5344CB8AC3E}">
-        <p14:creationId xmlns:p14="http://schemas.microsoft.com/office/powerpoint/2010/main" val="1440012984"/>
+        <p14:creationId xmlns:p14="http://schemas.microsoft.com/office/powerpoint/2010/main" val="708851451"/>
       </p:ext>
     </p:extLst>
   </p:cSld>
@@ -2097,7 +2097,7 @@
           <p:cNvPr id="6" name="">
             <a:extLst xmlns:a="http://schemas.openxmlformats.org/drawingml/2006/main">
               <a:ext uri="{FF2B5EF4-FFF2-40B4-BE49-F238E27FC236}">
-                <a16:creationId xmlns:a16="http://schemas.microsoft.com/office/drawing/2014/main" id="{9D4BE57F-5ABC-4448-A24C-2AEE87156915}"/>
+                <a16:creationId xmlns:a16="http://schemas.microsoft.com/office/drawing/2014/main" id="{B9E3DF22-7B43-4A33-ABA5-2B7E9401559C}"/>
               </a:ext>
             </a:extLst>
           </p:cNvPr>
@@ -2147,7 +2147,7 @@
           <p:cNvPr id="2" name="">
             <a:extLst xmlns:a="http://schemas.openxmlformats.org/drawingml/2006/main">
               <a:ext uri="{FF2B5EF4-FFF2-40B4-BE49-F238E27FC236}">
-                <a16:creationId xmlns:a16="http://schemas.microsoft.com/office/drawing/2014/main" id="{D6748869-1144-400A-9191-33767F31B183}"/>
+                <a16:creationId xmlns:a16="http://schemas.microsoft.com/office/drawing/2014/main" id="{9B8C5088-5431-42C5-9226-0A2A20B08BE3}"/>
               </a:ext>
             </a:extLst>
           </p:cNvPr>
@@ -2204,7 +2204,7 @@
         </p:xfrm>
         <a:graphic xmlns:a="http://schemas.openxmlformats.org/drawingml/2006/main">
           <a:graphicData uri="http://schemas.openxmlformats.org/drawingml/2006/chart">
-            <c:chart xmlns:r="http://schemas.openxmlformats.org/officeDocument/2006/relationships" xmlns:c="http://schemas.openxmlformats.org/drawingml/2006/chart" r:id="R282169fca0514ee6"/>
+            <c:chart xmlns:r="http://schemas.openxmlformats.org/officeDocument/2006/relationships" xmlns:c="http://schemas.openxmlformats.org/drawingml/2006/chart" r:id="R9f7fa1f18949401a"/>
           </a:graphicData>
         </a:graphic>
       </p:graphicFrame>
@@ -2213,7 +2213,7 @@
           <p:cNvPr id="4" name="">
             <a:extLst xmlns:a="http://schemas.openxmlformats.org/drawingml/2006/main">
               <a:ext uri="{FF2B5EF4-FFF2-40B4-BE49-F238E27FC236}">
-                <a16:creationId xmlns:a16="http://schemas.microsoft.com/office/drawing/2014/main" id="{AB4F79FD-98EB-4E4B-A68D-4440ABB8B1E1}"/>
+                <a16:creationId xmlns:a16="http://schemas.microsoft.com/office/drawing/2014/main" id="{47BED69A-E1C8-4D0F-AC0A-16AF9D8B2AF3}"/>
               </a:ext>
             </a:extLst>
           </p:cNvPr>
@@ -2263,7 +2263,7 @@
           <p:cNvPr id="5" name="">
             <a:extLst xmlns:a="http://schemas.openxmlformats.org/drawingml/2006/main">
               <a:ext uri="{FF2B5EF4-FFF2-40B4-BE49-F238E27FC236}">
-                <a16:creationId xmlns:a16="http://schemas.microsoft.com/office/drawing/2014/main" id="{66FFE76E-6256-4E90-9B84-56384EA6894B}"/>
+                <a16:creationId xmlns:a16="http://schemas.microsoft.com/office/drawing/2014/main" id="{25B9C3BE-771A-4EE3-A7F3-FF24F432C3BE}"/>
               </a:ext>
             </a:extLst>
           </p:cNvPr>
@@ -2379,7 +2379,7 @@
     </p:spTree>
     <p:extLst>
       <p:ext uri="{BB962C8B-B14F-4D97-AF65-F5344CB8AC3E}">
-        <p14:creationId xmlns:p14="http://schemas.microsoft.com/office/powerpoint/2010/main" val="1144796180"/>
+        <p14:creationId xmlns:p14="http://schemas.microsoft.com/office/powerpoint/2010/main" val="1186266889"/>
       </p:ext>
     </p:extLst>
   </p:cSld>
